--- a/How Great Thou Art-CH.pptx
+++ b/How Great Thou Art-CH.pptx
@@ -3896,7 +3896,7 @@
           <a:lstStyle/>
           <a:p>
             <a:pPr algn="l"/>
-            <a:endParaRPr lang="en-US" sz="3600" dirty="0">
+            <a:endParaRPr lang="en-US" sz="4000" dirty="0">
               <a:solidFill>
                 <a:srgbClr val="FFFF00"/>
               </a:solidFill>
@@ -3907,7 +3907,7 @@
           <a:p>
             <a:pPr algn="l"/>
             <a:r>
-              <a:rPr lang="en-US" sz="3600" dirty="0">
+              <a:rPr lang="en-US" sz="4000" dirty="0">
                 <a:solidFill>
                   <a:srgbClr val="FFFF00"/>
                 </a:solidFill>
@@ -3920,7 +3920,7 @@
           <a:p>
             <a:pPr algn="l"/>
             <a:r>
-              <a:rPr lang="en-US" sz="3600" dirty="0">
+              <a:rPr lang="en-US" sz="4000" dirty="0">
                 <a:solidFill>
                   <a:schemeClr val="bg1"/>
                 </a:solidFill>
@@ -3933,7 +3933,7 @@
           <a:p>
             <a:pPr algn="l"/>
             <a:r>
-              <a:rPr lang="en-US" sz="3600" dirty="0">
+              <a:rPr lang="en-US" sz="4000" dirty="0">
                 <a:solidFill>
                   <a:srgbClr val="FFFF00"/>
                 </a:solidFill>
@@ -3946,7 +3946,7 @@
           <a:p>
             <a:pPr algn="l"/>
             <a:r>
-              <a:rPr lang="en-US" sz="3600" dirty="0">
+              <a:rPr lang="en-US" sz="4000" dirty="0">
                 <a:solidFill>
                   <a:schemeClr val="bg1"/>
                 </a:solidFill>
@@ -3959,7 +3959,7 @@
           <a:p>
             <a:pPr algn="l"/>
             <a:r>
-              <a:rPr lang="en-US" sz="3600" dirty="0">
+              <a:rPr lang="en-US" sz="4000" dirty="0">
                 <a:solidFill>
                   <a:srgbClr val="FFFF00"/>
                 </a:solidFill>
@@ -3972,7 +3972,7 @@
           <a:p>
             <a:pPr algn="l"/>
             <a:r>
-              <a:rPr lang="en-US" sz="3600" dirty="0">
+              <a:rPr lang="en-US" sz="4000" dirty="0">
                 <a:solidFill>
                   <a:schemeClr val="bg1"/>
                 </a:solidFill>
@@ -3985,7 +3985,7 @@
           <a:p>
             <a:pPr algn="l"/>
             <a:r>
-              <a:rPr lang="en-US" sz="3600" dirty="0">
+              <a:rPr lang="en-US" sz="4000" dirty="0">
                 <a:solidFill>
                   <a:srgbClr val="FFFF00"/>
                 </a:solidFill>
@@ -3998,7 +3998,7 @@
           <a:p>
             <a:pPr algn="l"/>
             <a:r>
-              <a:rPr lang="en-US" sz="3600" dirty="0">
+              <a:rPr lang="en-US" sz="4000" dirty="0">
                 <a:solidFill>
                   <a:schemeClr val="bg1"/>
                 </a:solidFill>
@@ -4008,7 +4008,7 @@
               <a:t>Thy </a:t>
             </a:r>
             <a:r>
-              <a:rPr lang="en-US" sz="3600" dirty="0" err="1">
+              <a:rPr lang="en-US" sz="4000" dirty="0" err="1">
                 <a:solidFill>
                   <a:schemeClr val="bg1"/>
                 </a:solidFill>
@@ -4018,7 +4018,7 @@
               <a:t>pow'r</a:t>
             </a:r>
             <a:r>
-              <a:rPr lang="en-US" sz="3600" dirty="0">
+              <a:rPr lang="en-US" sz="4000" dirty="0">
                 <a:solidFill>
                   <a:schemeClr val="bg1"/>
                 </a:solidFill>
@@ -4106,7 +4106,7 @@
           <a:p>
             <a:pPr algn="l"/>
             <a:r>
-              <a:rPr lang="en-US" sz="3600" dirty="0">
+              <a:rPr lang="en-US" sz="4000" dirty="0">
                 <a:solidFill>
                   <a:schemeClr val="bg1"/>
                 </a:solidFill>
@@ -4119,7 +4119,7 @@
           <a:p>
             <a:pPr algn="l"/>
             <a:r>
-              <a:rPr lang="en-US" sz="3600" dirty="0">
+              <a:rPr lang="en-US" sz="4000" dirty="0">
                 <a:solidFill>
                   <a:srgbClr val="FFFF00"/>
                 </a:solidFill>
@@ -4132,7 +4132,7 @@
           <a:p>
             <a:pPr algn="l"/>
             <a:r>
-              <a:rPr lang="en-US" sz="3600" dirty="0">
+              <a:rPr lang="en-US" sz="4000" dirty="0">
                 <a:solidFill>
                   <a:schemeClr val="bg1"/>
                 </a:solidFill>
@@ -4145,7 +4145,7 @@
           <a:p>
             <a:pPr algn="l"/>
             <a:r>
-              <a:rPr lang="en-US" sz="3600" dirty="0">
+              <a:rPr lang="en-US" sz="4000" dirty="0">
                 <a:solidFill>
                   <a:srgbClr val="FFFF00"/>
                 </a:solidFill>
@@ -4158,7 +4158,7 @@
           <a:p>
             <a:pPr algn="l"/>
             <a:r>
-              <a:rPr lang="en-US" sz="3600" dirty="0">
+              <a:rPr lang="en-US" sz="4000" dirty="0">
                 <a:solidFill>
                   <a:schemeClr val="bg1"/>
                 </a:solidFill>
@@ -4171,7 +4171,7 @@
           <a:p>
             <a:pPr algn="l"/>
             <a:r>
-              <a:rPr lang="en-US" sz="3600" dirty="0">
+              <a:rPr lang="en-US" sz="4000" dirty="0">
                 <a:solidFill>
                   <a:srgbClr val="FFFF00"/>
                 </a:solidFill>
@@ -4184,7 +4184,7 @@
           <a:p>
             <a:pPr algn="l"/>
             <a:r>
-              <a:rPr lang="en-US" sz="3600" dirty="0">
+              <a:rPr lang="en-US" sz="4000" dirty="0">
                 <a:solidFill>
                   <a:schemeClr val="bg1"/>
                 </a:solidFill>
@@ -4197,7 +4197,7 @@
           <a:p>
             <a:pPr algn="l"/>
             <a:r>
-              <a:rPr lang="en-US" sz="3600" dirty="0">
+              <a:rPr lang="en-US" sz="4000" dirty="0">
                 <a:solidFill>
                   <a:srgbClr val="FFFF00"/>
                 </a:solidFill>
@@ -4210,7 +4210,7 @@
           <a:p>
             <a:pPr algn="l"/>
             <a:r>
-              <a:rPr lang="en-US" sz="3600" dirty="0">
+              <a:rPr lang="en-US" sz="4000" dirty="0">
                 <a:solidFill>
                   <a:schemeClr val="bg1"/>
                 </a:solidFill>

--- a/How Great Thou Art-CH.pptx
+++ b/How Great Thou Art-CH.pptx
@@ -264,7 +264,7 @@
           <a:p>
             <a:fld id="{E759A0DE-F190-5444-87AC-4719D5F20D15}" type="datetimeFigureOut">
               <a:rPr lang="en-US" smtClean="0"/>
-              <a:t>9/16/26</a:t>
+              <a:t>9/17/26</a:t>
             </a:fld>
             <a:endParaRPr lang="en-US"/>
           </a:p>
@@ -462,7 +462,7 @@
           <a:p>
             <a:fld id="{E759A0DE-F190-5444-87AC-4719D5F20D15}" type="datetimeFigureOut">
               <a:rPr lang="en-US" smtClean="0"/>
-              <a:t>9/16/26</a:t>
+              <a:t>9/17/26</a:t>
             </a:fld>
             <a:endParaRPr lang="en-US"/>
           </a:p>
@@ -670,7 +670,7 @@
           <a:p>
             <a:fld id="{E759A0DE-F190-5444-87AC-4719D5F20D15}" type="datetimeFigureOut">
               <a:rPr lang="en-US" smtClean="0"/>
-              <a:t>9/16/26</a:t>
+              <a:t>9/17/26</a:t>
             </a:fld>
             <a:endParaRPr lang="en-US"/>
           </a:p>
@@ -868,7 +868,7 @@
           <a:p>
             <a:fld id="{E759A0DE-F190-5444-87AC-4719D5F20D15}" type="datetimeFigureOut">
               <a:rPr lang="en-US" smtClean="0"/>
-              <a:t>9/16/26</a:t>
+              <a:t>9/17/26</a:t>
             </a:fld>
             <a:endParaRPr lang="en-US"/>
           </a:p>
@@ -1143,7 +1143,7 @@
           <a:p>
             <a:fld id="{E759A0DE-F190-5444-87AC-4719D5F20D15}" type="datetimeFigureOut">
               <a:rPr lang="en-US" smtClean="0"/>
-              <a:t>9/16/26</a:t>
+              <a:t>9/17/26</a:t>
             </a:fld>
             <a:endParaRPr lang="en-US"/>
           </a:p>
@@ -1408,7 +1408,7 @@
           <a:p>
             <a:fld id="{E759A0DE-F190-5444-87AC-4719D5F20D15}" type="datetimeFigureOut">
               <a:rPr lang="en-US" smtClean="0"/>
-              <a:t>9/16/26</a:t>
+              <a:t>9/17/26</a:t>
             </a:fld>
             <a:endParaRPr lang="en-US"/>
           </a:p>
@@ -1820,7 +1820,7 @@
           <a:p>
             <a:fld id="{E759A0DE-F190-5444-87AC-4719D5F20D15}" type="datetimeFigureOut">
               <a:rPr lang="en-US" smtClean="0"/>
-              <a:t>9/16/26</a:t>
+              <a:t>9/17/26</a:t>
             </a:fld>
             <a:endParaRPr lang="en-US"/>
           </a:p>
@@ -1961,7 +1961,7 @@
           <a:p>
             <a:fld id="{E759A0DE-F190-5444-87AC-4719D5F20D15}" type="datetimeFigureOut">
               <a:rPr lang="en-US" smtClean="0"/>
-              <a:t>9/16/26</a:t>
+              <a:t>9/17/26</a:t>
             </a:fld>
             <a:endParaRPr lang="en-US"/>
           </a:p>
@@ -2074,7 +2074,7 @@
           <a:p>
             <a:fld id="{E759A0DE-F190-5444-87AC-4719D5F20D15}" type="datetimeFigureOut">
               <a:rPr lang="en-US" smtClean="0"/>
-              <a:t>9/16/26</a:t>
+              <a:t>9/17/26</a:t>
             </a:fld>
             <a:endParaRPr lang="en-US"/>
           </a:p>
@@ -2385,7 +2385,7 @@
           <a:p>
             <a:fld id="{E759A0DE-F190-5444-87AC-4719D5F20D15}" type="datetimeFigureOut">
               <a:rPr lang="en-US" smtClean="0"/>
-              <a:t>9/16/26</a:t>
+              <a:t>9/17/26</a:t>
             </a:fld>
             <a:endParaRPr lang="en-US"/>
           </a:p>
@@ -2673,7 +2673,7 @@
           <a:p>
             <a:fld id="{E759A0DE-F190-5444-87AC-4719D5F20D15}" type="datetimeFigureOut">
               <a:rPr lang="en-US" smtClean="0"/>
-              <a:t>9/16/26</a:t>
+              <a:t>9/17/26</a:t>
             </a:fld>
             <a:endParaRPr lang="en-US"/>
           </a:p>
@@ -2914,7 +2914,7 @@
           <a:p>
             <a:fld id="{E759A0DE-F190-5444-87AC-4719D5F20D15}" type="datetimeFigureOut">
               <a:rPr lang="en-US" smtClean="0"/>
-              <a:t>9/16/26</a:t>
+              <a:t>9/17/26</a:t>
             </a:fld>
             <a:endParaRPr lang="en-US"/>
           </a:p>
@@ -4666,8 +4666,8 @@
         </p:nvSpPr>
         <p:spPr>
           <a:xfrm>
-            <a:off x="175846" y="152399"/>
-            <a:ext cx="11828585" cy="6541477"/>
+            <a:off x="175847" y="152399"/>
+            <a:ext cx="10972800" cy="6541477"/>
           </a:xfrm>
         </p:spPr>
         <p:txBody>
@@ -4787,6 +4787,45 @@
                 <a:ea typeface="Bodoni Ornaments" pitchFamily="2" charset="0"/>
               </a:rPr>
               <a:t>And there proclaim, My God, how great You are!</a:t>
+            </a:r>
+          </a:p>
+        </p:txBody>
+      </p:sp>
+      <p:sp>
+        <p:nvSpPr>
+          <p:cNvPr id="2" name="TextBox 1">
+            <a:extLst>
+              <a:ext uri="{FF2B5EF4-FFF2-40B4-BE49-F238E27FC236}">
+                <a16:creationId xmlns:a16="http://schemas.microsoft.com/office/drawing/2014/main" id="{5E5DF3D5-8BE2-BCFD-BFCB-6ABD3FC66498}"/>
+              </a:ext>
+            </a:extLst>
+          </p:cNvPr>
+          <p:cNvSpPr txBox="1"/>
+          <p:nvPr/>
+        </p:nvSpPr>
+        <p:spPr>
+          <a:xfrm>
+            <a:off x="10750062" y="6211669"/>
+            <a:ext cx="1007007" cy="584775"/>
+          </a:xfrm>
+          <a:prstGeom prst="rect">
+            <a:avLst/>
+          </a:prstGeom>
+          <a:noFill/>
+        </p:spPr>
+        <p:txBody>
+          <a:bodyPr wrap="none" rtlCol="0">
+            <a:spAutoFit/>
+          </a:bodyPr>
+          <a:lstStyle/>
+          <a:p>
+            <a:r>
+              <a:rPr lang="en-US" sz="3200" b="1" dirty="0">
+                <a:solidFill>
+                  <a:srgbClr val="FFFF00"/>
+                </a:solidFill>
+              </a:rPr>
+              <a:t>END</a:t>
             </a:r>
           </a:p>
         </p:txBody>
